--- a/prototype.pptx
+++ b/prototype.pptx
@@ -5597,7 +5597,7 @@
               </a:spcAft>
             </a:pPr>
             <a:r>
-              <a:rPr sz="1300" b="1" i="0">
+              <a:rPr sz="1300" b="1" i="0" dirty="0">
                 <a:solidFill>
                   <a:srgbClr val="1F2933"/>
                 </a:solidFill>
@@ -5606,7 +5606,7 @@
               <a:t>Problem Statement ID —</a:t>
             </a:r>
             <a:r>
-              <a:rPr sz="1300" b="0" i="0">
+              <a:rPr sz="1300" b="0" i="0" dirty="0">
                 <a:solidFill>
                   <a:srgbClr val="1F2933"/>
                 </a:solidFill>
@@ -5626,7 +5626,7 @@
               </a:spcAft>
             </a:pPr>
             <a:r>
-              <a:rPr sz="1300" b="1" i="0">
+              <a:rPr sz="1300" b="1" i="0" dirty="0">
                 <a:solidFill>
                   <a:srgbClr val="1F2933"/>
                 </a:solidFill>
@@ -5635,7 +5635,7 @@
               <a:t>Problem Statement Title —</a:t>
             </a:r>
             <a:r>
-              <a:rPr sz="1300" b="0" i="0">
+              <a:rPr sz="1300" b="0" i="0" dirty="0">
                 <a:solidFill>
                   <a:srgbClr val="1F2933"/>
                 </a:solidFill>
@@ -5654,7 +5654,7 @@
               </a:spcAft>
             </a:pPr>
             <a:r>
-              <a:rPr sz="1300" b="1" i="0">
+              <a:rPr sz="1300" b="1" i="0" dirty="0">
                 <a:solidFill>
                   <a:srgbClr val="1F2933"/>
                 </a:solidFill>
@@ -5663,7 +5663,7 @@
               <a:t>Theme —</a:t>
             </a:r>
             <a:r>
-              <a:rPr sz="1300" b="0" i="0">
+              <a:rPr sz="1300" b="0" i="0" dirty="0">
                 <a:solidFill>
                   <a:srgbClr val="1F2933"/>
                 </a:solidFill>
@@ -5682,7 +5682,7 @@
               </a:spcAft>
             </a:pPr>
             <a:r>
-              <a:rPr sz="1300" b="1" i="0">
+              <a:rPr sz="1300" b="1" i="0" dirty="0">
                 <a:solidFill>
                   <a:srgbClr val="1F2933"/>
                 </a:solidFill>
@@ -5691,7 +5691,7 @@
               <a:t>PS Category —</a:t>
             </a:r>
             <a:r>
-              <a:rPr sz="1300" b="0" i="0">
+              <a:rPr sz="1300" b="0" i="0" dirty="0">
                 <a:solidFill>
                   <a:srgbClr val="1F2933"/>
                 </a:solidFill>
@@ -5710,7 +5710,7 @@
               </a:spcAft>
             </a:pPr>
             <a:r>
-              <a:rPr sz="1300" b="1" i="0">
+              <a:rPr sz="1300" b="1" i="0" dirty="0">
                 <a:solidFill>
                   <a:srgbClr val="1F2933"/>
                 </a:solidFill>
@@ -5719,7 +5719,7 @@
               <a:t>Team ID —</a:t>
             </a:r>
             <a:r>
-              <a:rPr sz="1300" b="0" i="0">
+              <a:rPr sz="1300" b="0" i="0" dirty="0">
                 <a:solidFill>
                   <a:srgbClr val="1F2933"/>
                 </a:solidFill>
@@ -5738,7 +5738,7 @@
               </a:spcAft>
             </a:pPr>
             <a:r>
-              <a:rPr sz="1300" b="1" i="0">
+              <a:rPr sz="1300" b="1" i="0" dirty="0">
                 <a:solidFill>
                   <a:srgbClr val="1F2933"/>
                 </a:solidFill>
@@ -5747,7 +5747,7 @@
               <a:t>Team Name (Registered on portal) —</a:t>
             </a:r>
             <a:r>
-              <a:rPr sz="1300" b="0" i="0">
+              <a:rPr sz="1300" b="0" i="0" dirty="0">
                 <a:solidFill>
                   <a:srgbClr val="1F2933"/>
                 </a:solidFill>
@@ -6002,322 +6002,13 @@
               </a:spcAft>
             </a:pPr>
             <a:r>
-              <a:rPr sz="1050" b="0" i="1">
+              <a:rPr sz="1050" b="0" i="1" dirty="0">
                 <a:solidFill>
                   <a:srgbClr val="0E7C7B"/>
                 </a:solidFill>
                 <a:latin typeface="Calibri"/>
               </a:rPr>
               <a:t>Dam-break screening you can check.</a:t>
-            </a:r>
-          </a:p>
-        </p:txBody>
-      </p:sp>
-      <p:sp>
-        <p:nvSpPr>
-          <p:cNvPr id="43" name="TextBox 42"/>
-          <p:cNvSpPr txBox="1"/>
-          <p:nvPr/>
-        </p:nvSpPr>
-        <p:spPr>
-          <a:xfrm>
-            <a:off x="365760" y="4846320"/>
-            <a:ext cx="2743200" cy="201168"/>
-          </a:xfrm>
-          <a:prstGeom prst="rect">
-            <a:avLst/>
-          </a:prstGeom>
-          <a:noFill/>
-        </p:spPr>
-        <p:txBody>
-          <a:bodyPr wrap="square" lIns="18288" tIns="0" rIns="18288" bIns="0" anchor="t">
-            <a:spAutoFit/>
-          </a:bodyPr>
-          <a:lstStyle/>
-          <a:p>
-            <a:pPr algn="l">
-              <a:lnSpc>
-                <a:spcPct val="95000"/>
-              </a:lnSpc>
-              <a:spcAft>
-                <a:spcPts val="0"/>
-              </a:spcAft>
-            </a:pPr>
-            <a:r>
-              <a:rPr sz="800" b="1" i="0">
-                <a:solidFill>
-                  <a:srgbClr val="0F2B46"/>
-                </a:solidFill>
-                <a:latin typeface="Calibri"/>
-              </a:rPr>
-              <a:t>THEME</a:t>
-            </a:r>
-          </a:p>
-        </p:txBody>
-      </p:sp>
-      <p:sp>
-        <p:nvSpPr>
-          <p:cNvPr id="44" name="Rounded Rectangle 43"/>
-          <p:cNvSpPr/>
-          <p:nvPr/>
-        </p:nvSpPr>
-        <p:spPr>
-          <a:xfrm>
-            <a:off x="365760" y="5084064"/>
-            <a:ext cx="201168" cy="201168"/>
-          </a:xfrm>
-          <a:prstGeom prst="roundRect">
-            <a:avLst>
-              <a:gd name="adj" fmla="val 20000"/>
-            </a:avLst>
-          </a:prstGeom>
-          <a:solidFill>
-            <a:srgbClr val="0F2B46"/>
-          </a:solidFill>
-          <a:ln>
-            <a:noFill/>
-          </a:ln>
-          <a:effectLst/>
-        </p:spPr>
-        <p:style>
-          <a:lnRef idx="1">
-            <a:schemeClr val="accent1"/>
-          </a:lnRef>
-          <a:fillRef idx="3">
-            <a:schemeClr val="accent1"/>
-          </a:fillRef>
-          <a:effectRef idx="2">
-            <a:schemeClr val="accent1"/>
-          </a:effectRef>
-          <a:fontRef idx="minor">
-            <a:schemeClr val="lt1"/>
-          </a:fontRef>
-        </p:style>
-        <p:txBody>
-          <a:bodyPr wrap="square" lIns="82296" tIns="36576" rIns="82296" bIns="36576" rtlCol="0" anchor="ctr"/>
-          <a:lstStyle/>
-          <a:p>
-            <a:pPr algn="ctr"/>
-            <a:endParaRPr/>
-          </a:p>
-        </p:txBody>
-      </p:sp>
-      <p:sp>
-        <p:nvSpPr>
-          <p:cNvPr id="45" name="TextBox 44"/>
-          <p:cNvSpPr txBox="1"/>
-          <p:nvPr/>
-        </p:nvSpPr>
-        <p:spPr>
-          <a:xfrm>
-            <a:off x="612648" y="5084064"/>
-            <a:ext cx="548640" cy="201168"/>
-          </a:xfrm>
-          <a:prstGeom prst="rect">
-            <a:avLst/>
-          </a:prstGeom>
-          <a:noFill/>
-        </p:spPr>
-        <p:txBody>
-          <a:bodyPr wrap="square" lIns="18288" tIns="0" rIns="18288" bIns="0" anchor="ctr">
-            <a:spAutoFit/>
-          </a:bodyPr>
-          <a:lstStyle/>
-          <a:p>
-            <a:pPr algn="l">
-              <a:lnSpc>
-                <a:spcPct val="95000"/>
-              </a:lnSpc>
-              <a:spcAft>
-                <a:spcPts val="0"/>
-              </a:spcAft>
-            </a:pPr>
-            <a:r>
-              <a:rPr sz="740" b="0" i="0">
-                <a:solidFill>
-                  <a:srgbClr val="5A6672"/>
-                </a:solidFill>
-                <a:latin typeface="Calibri"/>
-              </a:rPr>
-              <a:t>#0F2B46</a:t>
-            </a:r>
-          </a:p>
-        </p:txBody>
-      </p:sp>
-      <p:sp>
-        <p:nvSpPr>
-          <p:cNvPr id="46" name="Rounded Rectangle 45"/>
-          <p:cNvSpPr/>
-          <p:nvPr/>
-        </p:nvSpPr>
-        <p:spPr>
-          <a:xfrm>
-            <a:off x="1207008" y="5084064"/>
-            <a:ext cx="201168" cy="201168"/>
-          </a:xfrm>
-          <a:prstGeom prst="roundRect">
-            <a:avLst>
-              <a:gd name="adj" fmla="val 20000"/>
-            </a:avLst>
-          </a:prstGeom>
-          <a:solidFill>
-            <a:srgbClr val="0E7C7B"/>
-          </a:solidFill>
-          <a:ln>
-            <a:noFill/>
-          </a:ln>
-          <a:effectLst/>
-        </p:spPr>
-        <p:style>
-          <a:lnRef idx="1">
-            <a:schemeClr val="accent1"/>
-          </a:lnRef>
-          <a:fillRef idx="3">
-            <a:schemeClr val="accent1"/>
-          </a:fillRef>
-          <a:effectRef idx="2">
-            <a:schemeClr val="accent1"/>
-          </a:effectRef>
-          <a:fontRef idx="minor">
-            <a:schemeClr val="lt1"/>
-          </a:fontRef>
-        </p:style>
-        <p:txBody>
-          <a:bodyPr wrap="square" lIns="82296" tIns="36576" rIns="82296" bIns="36576" rtlCol="0" anchor="ctr"/>
-          <a:lstStyle/>
-          <a:p>
-            <a:pPr algn="ctr"/>
-            <a:endParaRPr/>
-          </a:p>
-        </p:txBody>
-      </p:sp>
-      <p:sp>
-        <p:nvSpPr>
-          <p:cNvPr id="47" name="TextBox 46"/>
-          <p:cNvSpPr txBox="1"/>
-          <p:nvPr/>
-        </p:nvSpPr>
-        <p:spPr>
-          <a:xfrm>
-            <a:off x="1453896" y="5084064"/>
-            <a:ext cx="548640" cy="201168"/>
-          </a:xfrm>
-          <a:prstGeom prst="rect">
-            <a:avLst/>
-          </a:prstGeom>
-          <a:noFill/>
-        </p:spPr>
-        <p:txBody>
-          <a:bodyPr wrap="square" lIns="18288" tIns="0" rIns="18288" bIns="0" anchor="ctr">
-            <a:spAutoFit/>
-          </a:bodyPr>
-          <a:lstStyle/>
-          <a:p>
-            <a:pPr algn="l">
-              <a:lnSpc>
-                <a:spcPct val="95000"/>
-              </a:lnSpc>
-              <a:spcAft>
-                <a:spcPts val="0"/>
-              </a:spcAft>
-            </a:pPr>
-            <a:r>
-              <a:rPr sz="740" b="0" i="0">
-                <a:solidFill>
-                  <a:srgbClr val="5A6672"/>
-                </a:solidFill>
-                <a:latin typeface="Calibri"/>
-              </a:rPr>
-              <a:t>#0E7C7B</a:t>
-            </a:r>
-          </a:p>
-        </p:txBody>
-      </p:sp>
-      <p:sp>
-        <p:nvSpPr>
-          <p:cNvPr id="48" name="Rounded Rectangle 47"/>
-          <p:cNvSpPr/>
-          <p:nvPr/>
-        </p:nvSpPr>
-        <p:spPr>
-          <a:xfrm>
-            <a:off x="2048256" y="5084064"/>
-            <a:ext cx="201168" cy="201168"/>
-          </a:xfrm>
-          <a:prstGeom prst="roundRect">
-            <a:avLst>
-              <a:gd name="adj" fmla="val 20000"/>
-            </a:avLst>
-          </a:prstGeom>
-          <a:solidFill>
-            <a:srgbClr val="B02E2A"/>
-          </a:solidFill>
-          <a:ln>
-            <a:noFill/>
-          </a:ln>
-          <a:effectLst/>
-        </p:spPr>
-        <p:style>
-          <a:lnRef idx="1">
-            <a:schemeClr val="accent1"/>
-          </a:lnRef>
-          <a:fillRef idx="3">
-            <a:schemeClr val="accent1"/>
-          </a:fillRef>
-          <a:effectRef idx="2">
-            <a:schemeClr val="accent1"/>
-          </a:effectRef>
-          <a:fontRef idx="minor">
-            <a:schemeClr val="lt1"/>
-          </a:fontRef>
-        </p:style>
-        <p:txBody>
-          <a:bodyPr wrap="square" lIns="82296" tIns="36576" rIns="82296" bIns="36576" rtlCol="0" anchor="ctr"/>
-          <a:lstStyle/>
-          <a:p>
-            <a:pPr algn="ctr"/>
-            <a:endParaRPr/>
-          </a:p>
-        </p:txBody>
-      </p:sp>
-      <p:sp>
-        <p:nvSpPr>
-          <p:cNvPr id="49" name="TextBox 48"/>
-          <p:cNvSpPr txBox="1"/>
-          <p:nvPr/>
-        </p:nvSpPr>
-        <p:spPr>
-          <a:xfrm>
-            <a:off x="2295144" y="5084064"/>
-            <a:ext cx="548640" cy="201168"/>
-          </a:xfrm>
-          <a:prstGeom prst="rect">
-            <a:avLst/>
-          </a:prstGeom>
-          <a:noFill/>
-        </p:spPr>
-        <p:txBody>
-          <a:bodyPr wrap="square" lIns="18288" tIns="0" rIns="18288" bIns="0" anchor="ctr">
-            <a:spAutoFit/>
-          </a:bodyPr>
-          <a:lstStyle/>
-          <a:p>
-            <a:pPr algn="l">
-              <a:lnSpc>
-                <a:spcPct val="95000"/>
-              </a:lnSpc>
-              <a:spcAft>
-                <a:spcPts val="0"/>
-              </a:spcAft>
-            </a:pPr>
-            <a:r>
-              <a:rPr sz="740" b="0" i="0">
-                <a:solidFill>
-                  <a:srgbClr val="5A6672"/>
-                </a:solidFill>
-                <a:latin typeface="Calibri"/>
-              </a:rPr>
-              <a:t>#B02E2A</a:t>
             </a:r>
           </a:p>
         </p:txBody>
@@ -6502,7 +6193,12 @@
             <p:ph type="sldNum" sz="quarter" idx="12"/>
           </p:nvPr>
         </p:nvSpPr>
-        <p:spPr/>
+        <p:spPr>
+          <a:xfrm>
+            <a:off x="8472425" y="6159272"/>
+            <a:ext cx="2844800" cy="365125"/>
+          </a:xfrm>
+        </p:spPr>
         <p:txBody>
           <a:bodyPr/>
           <a:lstStyle/>
@@ -6664,7 +6360,7 @@
         </p:nvSpPr>
         <p:spPr>
           <a:xfrm>
-            <a:off x="320040" y="1225296"/>
+            <a:off x="148590" y="1197849"/>
             <a:ext cx="2852928" cy="274320"/>
           </a:xfrm>
           <a:prstGeom prst="rect">
@@ -6706,7 +6402,7 @@
         </p:nvSpPr>
         <p:spPr>
           <a:xfrm>
-            <a:off x="320040" y="1536192"/>
+            <a:off x="100583" y="1459876"/>
             <a:ext cx="2852928" cy="4645152"/>
           </a:xfrm>
           <a:prstGeom prst="roundRect">
@@ -6755,7 +6451,7 @@
         </p:nvSpPr>
         <p:spPr>
           <a:xfrm>
-            <a:off x="429768" y="1636776"/>
+            <a:off x="210311" y="1645920"/>
             <a:ext cx="2633472" cy="4443984"/>
           </a:xfrm>
           <a:prstGeom prst="rect">
@@ -6778,7 +6474,7 @@
               </a:spcAft>
             </a:pPr>
             <a:r>
-              <a:rPr sz="990" b="0" i="0">
+              <a:rPr sz="990" b="0" i="0" dirty="0">
                 <a:solidFill>
                   <a:srgbClr val="1F2933"/>
                 </a:solidFill>
@@ -6787,7 +6483,7 @@
               <a:t>▪ </a:t>
             </a:r>
             <a:r>
-              <a:rPr sz="990" b="1" i="0">
+              <a:rPr sz="990" b="1" i="0" dirty="0">
                 <a:solidFill>
                   <a:srgbClr val="1F2933"/>
                 </a:solidFill>
@@ -6796,13 +6492,49 @@
               <a:t>Operator enters four things</a:t>
             </a:r>
             <a:r>
-              <a:rPr sz="990" b="0" i="0">
-                <a:solidFill>
-                  <a:srgbClr val="1F2933"/>
-                </a:solidFill>
-                <a:latin typeface="Calibri"/>
-              </a:rPr>
-              <a:t> — lat/lon, dam height, gross storage, breach mode. Nothing else.</a:t>
+              <a:rPr sz="990" b="0" i="0" dirty="0">
+                <a:solidFill>
+                  <a:srgbClr val="1F2933"/>
+                </a:solidFill>
+                <a:latin typeface="Calibri"/>
+              </a:rPr>
+              <a:t> — </a:t>
+            </a:r>
+            <a:r>
+              <a:rPr sz="990" b="0" i="0" dirty="0" err="1">
+                <a:solidFill>
+                  <a:srgbClr val="1F2933"/>
+                </a:solidFill>
+                <a:latin typeface="Calibri"/>
+              </a:rPr>
+              <a:t>lat</a:t>
+            </a:r>
+            <a:r>
+              <a:rPr sz="990" b="0" i="0" dirty="0">
+                <a:solidFill>
+                  <a:srgbClr val="1F2933"/>
+                </a:solidFill>
+                <a:latin typeface="Calibri"/>
+              </a:rPr>
+              <a:t>/</a:t>
+            </a:r>
+            <a:r>
+              <a:rPr sz="990" b="0" i="0" dirty="0" err="1">
+                <a:solidFill>
+                  <a:srgbClr val="1F2933"/>
+                </a:solidFill>
+                <a:latin typeface="Calibri"/>
+              </a:rPr>
+              <a:t>lon</a:t>
+            </a:r>
+            <a:r>
+              <a:rPr sz="990" b="0" i="0" dirty="0">
+                <a:solidFill>
+                  <a:srgbClr val="1F2933"/>
+                </a:solidFill>
+                <a:latin typeface="Calibri"/>
+              </a:rPr>
+              <a:t>, dam height, gross storage, breach mode. Nothing else.</a:t>
             </a:r>
           </a:p>
           <a:p>
@@ -6815,7 +6547,7 @@
               </a:spcAft>
             </a:pPr>
             <a:r>
-              <a:rPr sz="990" b="0" i="0">
+              <a:rPr sz="990" b="0" i="0" dirty="0">
                 <a:solidFill>
                   <a:srgbClr val="1F2933"/>
                 </a:solidFill>
@@ -6824,7 +6556,7 @@
               <a:t>▪ </a:t>
             </a:r>
             <a:r>
-              <a:rPr sz="990" b="1" i="0">
+              <a:rPr sz="990" b="1" i="0" dirty="0">
                 <a:solidFill>
                   <a:srgbClr val="1F2933"/>
                 </a:solidFill>
@@ -6833,13 +6565,31 @@
               <a:t>Data fetches itself:</a:t>
             </a:r>
             <a:r>
-              <a:rPr sz="990" b="0" i="0">
-                <a:solidFill>
-                  <a:srgbClr val="1F2933"/>
-                </a:solidFill>
-                <a:latin typeface="Calibri"/>
-              </a:rPr>
-              <a:t> Copernicus GLO-30 DEM from public AWS COGs, GHSL population, Sentinel-1 SAR via Earth Engine, ESA WorldCover roughness.</a:t>
+              <a:rPr sz="990" b="0" i="0" dirty="0">
+                <a:solidFill>
+                  <a:srgbClr val="1F2933"/>
+                </a:solidFill>
+                <a:latin typeface="Calibri"/>
+              </a:rPr>
+              <a:t> Copernicus GLO-30 DEM from public AWS COGs, GHSL population, Sentinel-1 SAR via Earth Engine, ESA </a:t>
+            </a:r>
+            <a:r>
+              <a:rPr sz="990" b="0" i="0" dirty="0" err="1">
+                <a:solidFill>
+                  <a:srgbClr val="1F2933"/>
+                </a:solidFill>
+                <a:latin typeface="Calibri"/>
+              </a:rPr>
+              <a:t>WorldCover</a:t>
+            </a:r>
+            <a:r>
+              <a:rPr sz="990" b="0" i="0" dirty="0">
+                <a:solidFill>
+                  <a:srgbClr val="1F2933"/>
+                </a:solidFill>
+                <a:latin typeface="Calibri"/>
+              </a:rPr>
+              <a:t> roughness.</a:t>
             </a:r>
           </a:p>
           <a:p>
@@ -6852,7 +6602,7 @@
               </a:spcAft>
             </a:pPr>
             <a:r>
-              <a:rPr sz="990" b="0" i="0">
+              <a:rPr sz="990" b="0" i="0" dirty="0">
                 <a:solidFill>
                   <a:srgbClr val="1F2933"/>
                 </a:solidFill>
@@ -6861,7 +6611,7 @@
               <a:t>▪ </a:t>
             </a:r>
             <a:r>
-              <a:rPr sz="990" b="1" i="0">
+              <a:rPr sz="990" b="1" i="0" dirty="0">
                 <a:solidFill>
                   <a:srgbClr val="1F2933"/>
                 </a:solidFill>
@@ -6870,7 +6620,7 @@
               <a:t>Breach hydrograph</a:t>
             </a:r>
             <a:r>
-              <a:rPr sz="990" b="0" i="0">
+              <a:rPr sz="990" b="0" i="0" dirty="0">
                 <a:solidFill>
                   <a:srgbClr val="1F2933"/>
                 </a:solidFill>
@@ -6889,7 +6639,7 @@
               </a:spcAft>
             </a:pPr>
             <a:r>
-              <a:rPr sz="990" b="0" i="0">
+              <a:rPr sz="990" b="0" i="0" dirty="0">
                 <a:solidFill>
                   <a:srgbClr val="1F2933"/>
                 </a:solidFill>
@@ -6898,7 +6648,7 @@
               <a:t>▪ </a:t>
             </a:r>
             <a:r>
-              <a:rPr sz="990" b="1" i="0">
+              <a:rPr sz="990" b="1" i="0" dirty="0">
                 <a:solidFill>
                   <a:srgbClr val="1F2933"/>
                 </a:solidFill>
@@ -6907,13 +6657,31 @@
               <a:t>Far field:</a:t>
             </a:r>
             <a:r>
-              <a:rPr sz="990" b="0" i="0">
-                <a:solidFill>
-                  <a:srgbClr val="1F2933"/>
-                </a:solidFill>
-                <a:latin typeface="Calibri"/>
-              </a:rPr>
-              <a:t> in-house 2D shallow-water finite volume — HLLC Riemann solver, Audusse hydrostatic reconstruction, MUSCL, wetting and drying.</a:t>
+              <a:rPr sz="990" b="0" i="0" dirty="0">
+                <a:solidFill>
+                  <a:srgbClr val="1F2933"/>
+                </a:solidFill>
+                <a:latin typeface="Calibri"/>
+              </a:rPr>
+              <a:t> in-house 2D shallow-water finite volume — HLLC Riemann solver, </a:t>
+            </a:r>
+            <a:r>
+              <a:rPr sz="990" b="0" i="0" dirty="0" err="1">
+                <a:solidFill>
+                  <a:srgbClr val="1F2933"/>
+                </a:solidFill>
+                <a:latin typeface="Calibri"/>
+              </a:rPr>
+              <a:t>Audusse</a:t>
+            </a:r>
+            <a:r>
+              <a:rPr sz="990" b="0" i="0" dirty="0">
+                <a:solidFill>
+                  <a:srgbClr val="1F2933"/>
+                </a:solidFill>
+                <a:latin typeface="Calibri"/>
+              </a:rPr>
+              <a:t> hydrostatic reconstruction, MUSCL, wetting and drying.</a:t>
             </a:r>
           </a:p>
           <a:p>
@@ -6926,7 +6694,7 @@
               </a:spcAft>
             </a:pPr>
             <a:r>
-              <a:rPr sz="990" b="0" i="0">
+              <a:rPr sz="990" b="0" i="0" dirty="0">
                 <a:solidFill>
                   <a:srgbClr val="1F2933"/>
                 </a:solidFill>
@@ -6935,7 +6703,7 @@
               <a:t>▪ </a:t>
             </a:r>
             <a:r>
-              <a:rPr sz="990" b="1" i="0">
+              <a:rPr sz="990" b="1" i="0" dirty="0">
                 <a:solidFill>
                   <a:srgbClr val="1F2933"/>
                 </a:solidFill>
@@ -6944,7 +6712,7 @@
               <a:t>Near field:</a:t>
             </a:r>
             <a:r>
-              <a:rPr sz="990" b="0" i="0">
+              <a:rPr sz="990" b="0" i="0" dirty="0">
                 <a:solidFill>
                   <a:srgbClr val="1F2933"/>
                 </a:solidFill>
@@ -6963,7 +6731,7 @@
               </a:spcAft>
             </a:pPr>
             <a:r>
-              <a:rPr sz="990" b="0" i="0">
+              <a:rPr sz="990" b="0" i="0" dirty="0">
                 <a:solidFill>
                   <a:srgbClr val="1F2933"/>
                 </a:solidFill>
@@ -6972,7 +6740,7 @@
               <a:t>▪ </a:t>
             </a:r>
             <a:r>
-              <a:rPr sz="990" b="1" i="0">
+              <a:rPr sz="990" b="1" i="0" dirty="0">
                 <a:solidFill>
                   <a:srgbClr val="1F2933"/>
                 </a:solidFill>
@@ -6981,13 +6749,31 @@
               <a:t>Outputs</a:t>
             </a:r>
             <a:r>
-              <a:rPr sz="990" b="0" i="0">
-                <a:solidFill>
-                  <a:srgbClr val="1F2933"/>
-                </a:solidFill>
-                <a:latin typeface="Calibri"/>
-              </a:rPr>
-              <a:t> depth, velocity and arrival-time rasters to a browser dashboard, plus GeoTIFF, .SHP and .KML/KMZ.</a:t>
+              <a:rPr sz="990" b="0" i="0" dirty="0">
+                <a:solidFill>
+                  <a:srgbClr val="1F2933"/>
+                </a:solidFill>
+                <a:latin typeface="Calibri"/>
+              </a:rPr>
+              <a:t> depth, velocity and arrival-time rasters to a browser dashboard, plus </a:t>
+            </a:r>
+            <a:r>
+              <a:rPr sz="990" b="0" i="0" dirty="0" err="1">
+                <a:solidFill>
+                  <a:srgbClr val="1F2933"/>
+                </a:solidFill>
+                <a:latin typeface="Calibri"/>
+              </a:rPr>
+              <a:t>GeoTIFF</a:t>
+            </a:r>
+            <a:r>
+              <a:rPr sz="990" b="0" i="0" dirty="0">
+                <a:solidFill>
+                  <a:srgbClr val="1F2933"/>
+                </a:solidFill>
+                <a:latin typeface="Calibri"/>
+              </a:rPr>
+              <a:t>, .SHP and .KML/KMZ.</a:t>
             </a:r>
           </a:p>
         </p:txBody>
@@ -7000,7 +6786,7 @@
         </p:nvSpPr>
         <p:spPr>
           <a:xfrm>
-            <a:off x="3291840" y="1225296"/>
+            <a:off x="3049524" y="1197849"/>
             <a:ext cx="5285232" cy="274320"/>
           </a:xfrm>
           <a:prstGeom prst="rect">
@@ -7023,7 +6809,7 @@
               </a:spcAft>
             </a:pPr>
             <a:r>
-              <a:rPr sz="1150" b="1" i="0">
+              <a:rPr sz="1150" b="1" i="0" dirty="0">
                 <a:solidFill>
                   <a:srgbClr val="0F2B46"/>
                 </a:solidFill>
@@ -7050,7 +6836,7 @@
         </p:blipFill>
         <p:spPr>
           <a:xfrm>
-            <a:off x="3291840" y="1554480"/>
+            <a:off x="3049524" y="1554480"/>
             <a:ext cx="5285232" cy="3458977"/>
           </a:xfrm>
           <a:prstGeom prst="rect">
@@ -7066,7 +6852,7 @@
         </p:nvSpPr>
         <p:spPr>
           <a:xfrm>
-            <a:off x="3291840" y="5068321"/>
+            <a:off x="3049524" y="5080009"/>
             <a:ext cx="5285232" cy="457200"/>
           </a:xfrm>
           <a:prstGeom prst="rect">
@@ -7089,7 +6875,7 @@
               </a:spcAft>
             </a:pPr>
             <a:r>
-              <a:rPr sz="780" b="0" i="0">
+              <a:rPr sz="780" b="0" i="0" dirty="0">
                 <a:solidFill>
                   <a:srgbClr val="5A6672"/>
                 </a:solidFill>
@@ -7108,7 +6894,7 @@
         </p:nvSpPr>
         <p:spPr>
           <a:xfrm>
-            <a:off x="8705088" y="1225296"/>
+            <a:off x="8439913" y="1028215"/>
             <a:ext cx="3136392" cy="274320"/>
           </a:xfrm>
           <a:prstGeom prst="rect">
@@ -7150,8 +6936,8 @@
         </p:nvSpPr>
         <p:spPr>
           <a:xfrm>
-            <a:off x="8705088" y="1536192"/>
-            <a:ext cx="3136392" cy="2084831"/>
+            <a:off x="8430769" y="1275088"/>
+            <a:ext cx="3136392" cy="2058038"/>
           </a:xfrm>
           <a:prstGeom prst="roundRect">
             <a:avLst>
@@ -7199,8 +6985,8 @@
         </p:nvSpPr>
         <p:spPr>
           <a:xfrm>
-            <a:off x="8814815" y="1627632"/>
-            <a:ext cx="2916936" cy="1901952"/>
+            <a:off x="8540496" y="1366527"/>
+            <a:ext cx="2916936" cy="1440651"/>
           </a:xfrm>
           <a:prstGeom prst="rect">
             <a:avLst/>
@@ -7222,7 +7008,7 @@
               </a:spcAft>
             </a:pPr>
             <a:r>
-              <a:rPr sz="900" b="0" i="0">
+              <a:rPr sz="900" b="0" i="0" dirty="0">
                 <a:solidFill>
                   <a:srgbClr val="1F2933"/>
                 </a:solidFill>
@@ -7231,7 +7017,7 @@
               <a:t>▪ Engineered dam break </a:t>
             </a:r>
             <a:r>
-              <a:rPr sz="900" b="1" i="0">
+              <a:rPr sz="900" b="1" i="0" dirty="0">
                 <a:solidFill>
                   <a:srgbClr val="1F2933"/>
                 </a:solidFill>
@@ -7240,13 +7026,31 @@
               <a:t>and</a:t>
             </a:r>
             <a:r>
-              <a:rPr sz="900" b="0" i="0">
-                <a:solidFill>
-                  <a:srgbClr val="1F2933"/>
-                </a:solidFill>
-                <a:latin typeface="Calibri"/>
-              </a:rPr>
-              <a:t> natural landslide-dam blockage, one pipeline.</a:t>
+              <a:rPr sz="900" b="0" i="0" dirty="0">
+                <a:solidFill>
+                  <a:srgbClr val="1F2933"/>
+                </a:solidFill>
+                <a:latin typeface="Calibri"/>
+              </a:rPr>
+              <a:t> natural landslide-dam blockage</a:t>
+            </a:r>
+            <a:r>
+              <a:rPr lang="en-IN" sz="900" b="0" i="0" dirty="0">
+                <a:solidFill>
+                  <a:srgbClr val="1F2933"/>
+                </a:solidFill>
+                <a:latin typeface="Calibri"/>
+              </a:rPr>
+              <a:t> and river blockage</a:t>
+            </a:r>
+            <a:r>
+              <a:rPr sz="900" b="0" i="0" dirty="0">
+                <a:solidFill>
+                  <a:srgbClr val="1F2933"/>
+                </a:solidFill>
+                <a:latin typeface="Calibri"/>
+              </a:rPr>
+              <a:t>, one pipeline.</a:t>
             </a:r>
           </a:p>
           <a:p>
@@ -7259,7 +7063,7 @@
               </a:spcAft>
             </a:pPr>
             <a:r>
-              <a:rPr sz="900" b="0" i="0">
+              <a:rPr sz="900" b="0" i="0" dirty="0">
                 <a:solidFill>
                   <a:srgbClr val="1F2933"/>
                 </a:solidFill>
@@ -7268,22 +7072,58 @@
               <a:t>▪ GUI for input and tiled output; </a:t>
             </a:r>
             <a:r>
-              <a:rPr sz="900" b="1" i="0">
-                <a:solidFill>
-                  <a:srgbClr val="1F2933"/>
-                </a:solidFill>
-                <a:latin typeface="Calibri"/>
-              </a:rPr>
-              <a:t>.shp / .kml export</a:t>
-            </a:r>
-            <a:r>
-              <a:rPr sz="900" b="0" i="0">
-                <a:solidFill>
-                  <a:srgbClr val="1F2933"/>
-                </a:solidFill>
-                <a:latin typeface="Calibri"/>
-              </a:rPr>
-              <a:t> exactly as the PS asks.</a:t>
+              <a:rPr sz="900" b="1" i="0" dirty="0">
+                <a:solidFill>
+                  <a:srgbClr val="1F2933"/>
+                </a:solidFill>
+                <a:latin typeface="Calibri"/>
+              </a:rPr>
+              <a:t>.</a:t>
+            </a:r>
+            <a:r>
+              <a:rPr sz="900" b="1" i="0" dirty="0" err="1">
+                <a:solidFill>
+                  <a:srgbClr val="1F2933"/>
+                </a:solidFill>
+                <a:latin typeface="Calibri"/>
+              </a:rPr>
+              <a:t>shp</a:t>
+            </a:r>
+            <a:r>
+              <a:rPr sz="900" b="1" i="0" dirty="0">
+                <a:solidFill>
+                  <a:srgbClr val="1F2933"/>
+                </a:solidFill>
+                <a:latin typeface="Calibri"/>
+              </a:rPr>
+              <a:t> / .</a:t>
+            </a:r>
+            <a:r>
+              <a:rPr sz="900" b="1" i="0" dirty="0" err="1">
+                <a:solidFill>
+                  <a:srgbClr val="1F2933"/>
+                </a:solidFill>
+                <a:latin typeface="Calibri"/>
+              </a:rPr>
+              <a:t>kml</a:t>
+            </a:r>
+            <a:r>
+              <a:rPr sz="900" b="1" i="0" dirty="0">
+                <a:solidFill>
+                  <a:srgbClr val="1F2933"/>
+                </a:solidFill>
+                <a:latin typeface="Calibri"/>
+              </a:rPr>
+              <a:t> export</a:t>
+            </a:r>
+            <a:r>
+              <a:rPr sz="900" b="0" i="0" dirty="0">
+                <a:solidFill>
+                  <a:srgbClr val="1F2933"/>
+                </a:solidFill>
+                <a:latin typeface="Calibri"/>
+              </a:rPr>
+              <a:t> .</a:t>
             </a:r>
           </a:p>
           <a:p>
@@ -7296,7 +7136,7 @@
               </a:spcAft>
             </a:pPr>
             <a:r>
-              <a:rPr sz="900" b="0" i="0">
+              <a:rPr sz="900" b="0" i="0" dirty="0">
                 <a:solidFill>
                   <a:srgbClr val="1F2933"/>
                 </a:solidFill>
@@ -7315,7 +7155,7 @@
               </a:spcAft>
             </a:pPr>
             <a:r>
-              <a:rPr sz="900" b="0" i="0">
+              <a:rPr sz="900" b="0" i="0" dirty="0">
                 <a:solidFill>
                   <a:srgbClr val="1F2933"/>
                 </a:solidFill>
@@ -7324,7 +7164,7 @@
               <a:t>▪ Sentinel-1 SAR loop scores simulated extent against </a:t>
             </a:r>
             <a:r>
-              <a:rPr sz="900" b="1" i="0">
+              <a:rPr sz="900" b="1" i="0" dirty="0">
                 <a:solidFill>
                   <a:srgbClr val="1F2933"/>
                 </a:solidFill>
@@ -7333,7 +7173,7 @@
               <a:t>observed</a:t>
             </a:r>
             <a:r>
-              <a:rPr sz="900" b="0" i="0">
+              <a:rPr sz="900" b="0" i="0" dirty="0">
                 <a:solidFill>
                   <a:srgbClr val="1F2933"/>
                 </a:solidFill>
@@ -7352,7 +7192,7 @@
               </a:spcAft>
             </a:pPr>
             <a:r>
-              <a:rPr sz="900" b="0" i="0">
+              <a:rPr sz="900" b="0" i="0" dirty="0">
                 <a:solidFill>
                   <a:srgbClr val="1F2933"/>
                 </a:solidFill>
@@ -7361,7 +7201,7 @@
               <a:t>▪ Runs </a:t>
             </a:r>
             <a:r>
-              <a:rPr sz="900" b="1" i="0">
+              <a:rPr sz="900" b="1" i="0" dirty="0">
                 <a:solidFill>
                   <a:srgbClr val="1F2933"/>
                 </a:solidFill>
@@ -7370,7 +7210,7 @@
               <a:t>offline from cache</a:t>
             </a:r>
             <a:r>
-              <a:rPr sz="900" b="0" i="0">
+              <a:rPr sz="900" b="0" i="0" dirty="0">
                 <a:solidFill>
                   <a:srgbClr val="1F2933"/>
                 </a:solidFill>
@@ -7389,7 +7229,7 @@
         </p:nvSpPr>
         <p:spPr>
           <a:xfrm>
-            <a:off x="8705088" y="3730752"/>
+            <a:off x="8430769" y="3469647"/>
             <a:ext cx="3136392" cy="274320"/>
           </a:xfrm>
           <a:prstGeom prst="rect">
@@ -7431,7 +7271,7 @@
         </p:nvSpPr>
         <p:spPr>
           <a:xfrm>
-            <a:off x="8705088" y="3950208"/>
+            <a:off x="8439913" y="3753127"/>
             <a:ext cx="3136392" cy="2395728"/>
           </a:xfrm>
           <a:prstGeom prst="roundRect">
@@ -7480,8 +7320,8 @@
         </p:nvSpPr>
         <p:spPr>
           <a:xfrm>
-            <a:off x="8814815" y="4089913"/>
-            <a:ext cx="2916936" cy="182880"/>
+            <a:off x="8540496" y="3828808"/>
+            <a:ext cx="2916936" cy="122791"/>
           </a:xfrm>
           <a:prstGeom prst="rect">
             <a:avLst/>
@@ -7503,7 +7343,16 @@
               </a:spcAft>
             </a:pPr>
             <a:r>
-              <a:rPr sz="840" b="0" i="0">
+              <a:rPr lang="en-IN" sz="840" dirty="0">
+                <a:solidFill>
+                  <a:srgbClr val="1F2933"/>
+                </a:solidFill>
+                <a:latin typeface="Calibri"/>
+              </a:rPr>
+              <a:t>Comparison </a:t>
+            </a:r>
+            <a:r>
+              <a:rPr sz="840" b="0" i="0" dirty="0">
                 <a:solidFill>
                   <a:srgbClr val="1F2933"/>
                 </a:solidFill>
@@ -7523,30 +7372,30 @@
           <p:nvPr>
             <p:extLst>
               <p:ext uri="{D42A27DB-BD31-4B8C-83A1-F6EECF244321}">
-                <p14:modId xmlns:p14="http://schemas.microsoft.com/office/powerpoint/2010/main" val="2673869768"/>
+                <p14:modId xmlns:p14="http://schemas.microsoft.com/office/powerpoint/2010/main" val="2486722045"/>
               </p:ext>
             </p:extLst>
           </p:nvPr>
         </p:nvGraphicFramePr>
         <p:xfrm>
-          <a:off x="8814815" y="4291081"/>
-          <a:ext cx="2916936" cy="1234440"/>
+          <a:off x="8493761" y="3971624"/>
+          <a:ext cx="3035807" cy="1347030"/>
         </p:xfrm>
         <a:graphic>
           <a:graphicData uri="http://schemas.openxmlformats.org/drawingml/2006/table">
             <a:tbl>
               <a:tblPr firstRow="1">
-                <a:tableStyleId>{5C22544A-7EE6-4342-B048-85BDC9FD1C3A}</a:tableStyleId>
+                <a:tableStyleId>{46F890A9-2807-4EBB-B81D-B2AA78EC7F39}</a:tableStyleId>
               </a:tblPr>
               <a:tblGrid>
-                <a:gridCol w="1417320">
+                <a:gridCol w="1475079">
                   <a:extLst>
                     <a:ext uri="{9D8B030D-6E8A-4147-A177-3AD203B41FA5}">
                       <a16:colId xmlns:a16="http://schemas.microsoft.com/office/drawing/2014/main" val="20000"/>
                     </a:ext>
                   </a:extLst>
                 </a:gridCol>
-                <a:gridCol w="1499616">
+                <a:gridCol w="1560728">
                   <a:extLst>
                     <a:ext uri="{9D8B030D-6E8A-4147-A177-3AD203B41FA5}">
                       <a16:colId xmlns:a16="http://schemas.microsoft.com/office/drawing/2014/main" val="20001"/>
@@ -7554,7 +7403,7 @@
                   </a:extLst>
                 </a:gridCol>
               </a:tblGrid>
-              <a:tr h="205740">
+              <a:tr h="224505">
                 <a:tc>
                   <a:txBody>
                     <a:bodyPr/>
@@ -7569,21 +7418,22 @@
                         </a:spcAft>
                       </a:pPr>
                       <a:r>
-                        <a:rPr sz="770" b="1" i="0" dirty="0">
+                        <a:rPr sz="770" b="1" dirty="0">
                           <a:solidFill>
                             <a:srgbClr val="FFFFFF"/>
                           </a:solidFill>
-                          <a:latin typeface="Calibri"/>
                         </a:rPr>
                         <a:t>Current practice</a:t>
                       </a:r>
+                      <a:endParaRPr sz="770" b="1" i="0" dirty="0">
+                        <a:solidFill>
+                          <a:srgbClr val="FFFFFF"/>
+                        </a:solidFill>
+                        <a:latin typeface="Calibri"/>
+                      </a:endParaRPr>
                     </a:p>
                   </a:txBody>
-                  <a:tcPr marL="64008" marR="64008" marT="13716" marB="13716" anchor="ctr">
-                    <a:solidFill>
-                      <a:srgbClr val="B02E2A"/>
-                    </a:solidFill>
-                  </a:tcPr>
+                  <a:tcPr marL="64008" marR="64008" marT="13716" marB="13716" anchor="ctr"/>
                 </a:tc>
                 <a:tc>
                   <a:txBody>
@@ -7599,11 +7449,10 @@
                         </a:spcAft>
                       </a:pPr>
                       <a:r>
-                        <a:rPr lang="en-IN" sz="770" b="1" i="0" dirty="0">
+                        <a:rPr lang="en-IN" sz="770" b="1" dirty="0">
                           <a:solidFill>
                             <a:srgbClr val="FFFFFF"/>
                           </a:solidFill>
-                          <a:latin typeface="Calibri"/>
                         </a:rPr>
                         <a:t>Project name</a:t>
                       </a:r>
@@ -7615,11 +7464,7 @@
                       </a:endParaRPr>
                     </a:p>
                   </a:txBody>
-                  <a:tcPr marL="64008" marR="64008" marT="13716" marB="13716" anchor="ctr">
-                    <a:solidFill>
-                      <a:srgbClr val="B02E2A"/>
-                    </a:solidFill>
-                  </a:tcPr>
+                  <a:tcPr marL="64008" marR="64008" marT="13716" marB="13716" anchor="ctr"/>
                 </a:tc>
                 <a:extLst>
                   <a:ext uri="{0D108BD9-81ED-4DB2-BD59-A6C34878D82A}">
@@ -7627,7 +7472,7 @@
                   </a:ext>
                 </a:extLst>
               </a:tr>
-              <a:tr h="205740">
+              <a:tr h="224505">
                 <a:tc>
                   <a:txBody>
                     <a:bodyPr/>
@@ -7642,21 +7487,22 @@
                         </a:spcAft>
                       </a:pPr>
                       <a:r>
-                        <a:rPr sz="770" b="0" i="0">
+                        <a:rPr sz="770" b="0">
                           <a:solidFill>
                             <a:srgbClr val="1F2933"/>
                           </a:solidFill>
-                          <a:latin typeface="Calibri"/>
                         </a:rPr>
                         <a:t>Weeks of specialist setup</a:t>
                       </a:r>
+                      <a:endParaRPr sz="770" b="0" i="0">
+                        <a:solidFill>
+                          <a:srgbClr val="1F2933"/>
+                        </a:solidFill>
+                        <a:latin typeface="Calibri"/>
+                      </a:endParaRPr>
                     </a:p>
                   </a:txBody>
-                  <a:tcPr marL="64008" marR="64008" marT="13716" marB="13716" anchor="ctr">
-                    <a:solidFill>
-                      <a:srgbClr val="FFFFFF"/>
-                    </a:solidFill>
-                  </a:tcPr>
+                  <a:tcPr marL="64008" marR="64008" marT="13716" marB="13716" anchor="ctr"/>
                 </a:tc>
                 <a:tc>
                   <a:txBody>
@@ -7672,21 +7518,22 @@
                         </a:spcAft>
                       </a:pPr>
                       <a:r>
-                        <a:rPr sz="770" b="0" i="0">
+                        <a:rPr sz="770" b="0">
                           <a:solidFill>
                             <a:srgbClr val="1F2933"/>
                           </a:solidFill>
-                          <a:latin typeface="Calibri"/>
                         </a:rPr>
                         <a:t>Minutes, 4 inputs</a:t>
                       </a:r>
+                      <a:endParaRPr sz="770" b="0" i="0">
+                        <a:solidFill>
+                          <a:srgbClr val="1F2933"/>
+                        </a:solidFill>
+                        <a:latin typeface="Calibri"/>
+                      </a:endParaRPr>
                     </a:p>
                   </a:txBody>
-                  <a:tcPr marL="64008" marR="64008" marT="13716" marB="13716" anchor="ctr">
-                    <a:solidFill>
-                      <a:srgbClr val="FFFFFF"/>
-                    </a:solidFill>
-                  </a:tcPr>
+                  <a:tcPr marL="64008" marR="64008" marT="13716" marB="13716" anchor="ctr"/>
                 </a:tc>
                 <a:extLst>
                   <a:ext uri="{0D108BD9-81ED-4DB2-BD59-A6C34878D82A}">
@@ -7694,7 +7541,7 @@
                   </a:ext>
                 </a:extLst>
               </a:tr>
-              <a:tr h="205740">
+              <a:tr h="224505">
                 <a:tc>
                   <a:txBody>
                     <a:bodyPr/>
@@ -7709,21 +7556,22 @@
                         </a:spcAft>
                       </a:pPr>
                       <a:r>
-                        <a:rPr sz="770" b="0" i="0">
+                        <a:rPr sz="770" b="0">
                           <a:solidFill>
                             <a:srgbClr val="1F2933"/>
                           </a:solidFill>
-                          <a:latin typeface="Calibri"/>
                         </a:rPr>
                         <a:t>Licence + field survey</a:t>
                       </a:r>
+                      <a:endParaRPr sz="770" b="0" i="0">
+                        <a:solidFill>
+                          <a:srgbClr val="1F2933"/>
+                        </a:solidFill>
+                        <a:latin typeface="Calibri"/>
+                      </a:endParaRPr>
                     </a:p>
                   </a:txBody>
-                  <a:tcPr marL="64008" marR="64008" marT="13716" marB="13716" anchor="ctr">
-                    <a:solidFill>
-                      <a:srgbClr val="EEF4F9"/>
-                    </a:solidFill>
-                  </a:tcPr>
+                  <a:tcPr marL="64008" marR="64008" marT="13716" marB="13716" anchor="ctr"/>
                 </a:tc>
                 <a:tc>
                   <a:txBody>
@@ -7739,21 +7587,22 @@
                         </a:spcAft>
                       </a:pPr>
                       <a:r>
-                        <a:rPr sz="770" b="0" i="0">
+                        <a:rPr sz="770" b="0">
                           <a:solidFill>
                             <a:srgbClr val="1F2933"/>
                           </a:solidFill>
-                          <a:latin typeface="Calibri"/>
                         </a:rPr>
                         <a:t>Free data, no survey</a:t>
                       </a:r>
+                      <a:endParaRPr sz="770" b="0" i="0">
+                        <a:solidFill>
+                          <a:srgbClr val="1F2933"/>
+                        </a:solidFill>
+                        <a:latin typeface="Calibri"/>
+                      </a:endParaRPr>
                     </a:p>
                   </a:txBody>
-                  <a:tcPr marL="64008" marR="64008" marT="13716" marB="13716" anchor="ctr">
-                    <a:solidFill>
-                      <a:srgbClr val="EEF4F9"/>
-                    </a:solidFill>
-                  </a:tcPr>
+                  <a:tcPr marL="64008" marR="64008" marT="13716" marB="13716" anchor="ctr"/>
                 </a:tc>
                 <a:extLst>
                   <a:ext uri="{0D108BD9-81ED-4DB2-BD59-A6C34878D82A}">
@@ -7761,7 +7610,7 @@
                   </a:ext>
                 </a:extLst>
               </a:tr>
-              <a:tr h="205740">
+              <a:tr h="224505">
                 <a:tc>
                   <a:txBody>
                     <a:bodyPr/>
@@ -7776,21 +7625,22 @@
                         </a:spcAft>
                       </a:pPr>
                       <a:r>
-                        <a:rPr sz="770" b="0" i="0">
+                        <a:rPr sz="770" b="0">
                           <a:solidFill>
                             <a:srgbClr val="1F2933"/>
                           </a:solidFill>
-                          <a:latin typeface="Calibri"/>
                         </a:rPr>
                         <a:t>No independent check</a:t>
                       </a:r>
+                      <a:endParaRPr sz="770" b="0" i="0">
+                        <a:solidFill>
+                          <a:srgbClr val="1F2933"/>
+                        </a:solidFill>
+                        <a:latin typeface="Calibri"/>
+                      </a:endParaRPr>
                     </a:p>
                   </a:txBody>
-                  <a:tcPr marL="64008" marR="64008" marT="13716" marB="13716" anchor="ctr">
-                    <a:solidFill>
-                      <a:srgbClr val="FFFFFF"/>
-                    </a:solidFill>
-                  </a:tcPr>
+                  <a:tcPr marL="64008" marR="64008" marT="13716" marB="13716" anchor="ctr"/>
                 </a:tc>
                 <a:tc>
                   <a:txBody>
@@ -7806,21 +7656,22 @@
                         </a:spcAft>
                       </a:pPr>
                       <a:r>
-                        <a:rPr sz="770" b="0" i="0">
+                        <a:rPr sz="770" b="0">
                           <a:solidFill>
                             <a:srgbClr val="1F2933"/>
                           </a:solidFill>
-                          <a:latin typeface="Calibri"/>
                         </a:rPr>
                         <a:t>Scored vs Delft3D FM</a:t>
                       </a:r>
+                      <a:endParaRPr sz="770" b="0" i="0">
+                        <a:solidFill>
+                          <a:srgbClr val="1F2933"/>
+                        </a:solidFill>
+                        <a:latin typeface="Calibri"/>
+                      </a:endParaRPr>
                     </a:p>
                   </a:txBody>
-                  <a:tcPr marL="64008" marR="64008" marT="13716" marB="13716" anchor="ctr">
-                    <a:solidFill>
-                      <a:srgbClr val="FFFFFF"/>
-                    </a:solidFill>
-                  </a:tcPr>
+                  <a:tcPr marL="64008" marR="64008" marT="13716" marB="13716" anchor="ctr"/>
                 </a:tc>
                 <a:extLst>
                   <a:ext uri="{0D108BD9-81ED-4DB2-BD59-A6C34878D82A}">
@@ -7828,7 +7679,7 @@
                   </a:ext>
                 </a:extLst>
               </a:tr>
-              <a:tr h="205740">
+              <a:tr h="224505">
                 <a:tc>
                   <a:txBody>
                     <a:bodyPr/>
@@ -7843,21 +7694,22 @@
                         </a:spcAft>
                       </a:pPr>
                       <a:r>
-                        <a:rPr sz="770" b="0" i="0">
+                        <a:rPr sz="770" b="0">
                           <a:solidFill>
                             <a:srgbClr val="1F2933"/>
                           </a:solidFill>
-                          <a:latin typeface="Calibri"/>
                         </a:rPr>
                         <a:t>One number for peak flow</a:t>
                       </a:r>
+                      <a:endParaRPr sz="770" b="0" i="0">
+                        <a:solidFill>
+                          <a:srgbClr val="1F2933"/>
+                        </a:solidFill>
+                        <a:latin typeface="Calibri"/>
+                      </a:endParaRPr>
                     </a:p>
                   </a:txBody>
-                  <a:tcPr marL="64008" marR="64008" marT="13716" marB="13716" anchor="ctr">
-                    <a:solidFill>
-                      <a:srgbClr val="EEF4F9"/>
-                    </a:solidFill>
-                  </a:tcPr>
+                  <a:tcPr marL="64008" marR="64008" marT="13716" marB="13716" anchor="ctr"/>
                 </a:tc>
                 <a:tc>
                   <a:txBody>
@@ -7873,21 +7725,22 @@
                         </a:spcAft>
                       </a:pPr>
                       <a:r>
-                        <a:rPr sz="770" b="0" i="0">
+                        <a:rPr sz="770" b="0">
                           <a:solidFill>
                             <a:srgbClr val="1F2933"/>
                           </a:solidFill>
-                          <a:latin typeface="Calibri"/>
                         </a:rPr>
                         <a:t>p05–p95 band</a:t>
                       </a:r>
+                      <a:endParaRPr sz="770" b="0" i="0">
+                        <a:solidFill>
+                          <a:srgbClr val="1F2933"/>
+                        </a:solidFill>
+                        <a:latin typeface="Calibri"/>
+                      </a:endParaRPr>
                     </a:p>
                   </a:txBody>
-                  <a:tcPr marL="64008" marR="64008" marT="13716" marB="13716" anchor="ctr">
-                    <a:solidFill>
-                      <a:srgbClr val="EEF4F9"/>
-                    </a:solidFill>
-                  </a:tcPr>
+                  <a:tcPr marL="64008" marR="64008" marT="13716" marB="13716" anchor="ctr"/>
                 </a:tc>
                 <a:extLst>
                   <a:ext uri="{0D108BD9-81ED-4DB2-BD59-A6C34878D82A}">
@@ -7895,7 +7748,7 @@
                   </a:ext>
                 </a:extLst>
               </a:tr>
-              <a:tr h="205740">
+              <a:tr h="224505">
                 <a:tc>
                   <a:txBody>
                     <a:bodyPr/>
@@ -7910,21 +7763,22 @@
                         </a:spcAft>
                       </a:pPr>
                       <a:r>
-                        <a:rPr sz="770" b="0" i="0">
+                        <a:rPr sz="770" b="0" dirty="0">
                           <a:solidFill>
                             <a:srgbClr val="1F2933"/>
                           </a:solidFill>
-                          <a:latin typeface="Calibri"/>
                         </a:rPr>
                         <a:t>Bad SAR scenes drawn</a:t>
                       </a:r>
+                      <a:endParaRPr sz="770" b="0" i="0" dirty="0">
+                        <a:solidFill>
+                          <a:srgbClr val="1F2933"/>
+                        </a:solidFill>
+                        <a:latin typeface="Calibri"/>
+                      </a:endParaRPr>
                     </a:p>
                   </a:txBody>
-                  <a:tcPr marL="64008" marR="64008" marT="13716" marB="13716" anchor="ctr">
-                    <a:solidFill>
-                      <a:srgbClr val="FFFFFF"/>
-                    </a:solidFill>
-                  </a:tcPr>
+                  <a:tcPr marL="64008" marR="64008" marT="13716" marB="13716" anchor="ctr"/>
                 </a:tc>
                 <a:tc>
                   <a:txBody>
@@ -7940,21 +7794,22 @@
                         </a:spcAft>
                       </a:pPr>
                       <a:r>
-                        <a:rPr sz="770" b="0" i="0" dirty="0">
+                        <a:rPr sz="770" b="0" dirty="0">
                           <a:solidFill>
                             <a:srgbClr val="1F2933"/>
                           </a:solidFill>
-                          <a:latin typeface="Calibri"/>
                         </a:rPr>
                         <a:t>Refused at a 0.50 gate</a:t>
                       </a:r>
+                      <a:endParaRPr sz="770" b="0" i="0" dirty="0">
+                        <a:solidFill>
+                          <a:srgbClr val="1F2933"/>
+                        </a:solidFill>
+                        <a:latin typeface="Calibri"/>
+                      </a:endParaRPr>
                     </a:p>
                   </a:txBody>
-                  <a:tcPr marL="64008" marR="64008" marT="13716" marB="13716" anchor="ctr">
-                    <a:solidFill>
-                      <a:srgbClr val="FFFFFF"/>
-                    </a:solidFill>
-                  </a:tcPr>
+                  <a:tcPr marL="64008" marR="64008" marT="13716" marB="13716" anchor="ctr"/>
                 </a:tc>
                 <a:extLst>
                   <a:ext uri="{0D108BD9-81ED-4DB2-BD59-A6C34878D82A}">
@@ -7974,7 +7829,7 @@
         </p:nvSpPr>
         <p:spPr>
           <a:xfrm>
-            <a:off x="8814815" y="5614416"/>
+            <a:off x="8549640" y="5417335"/>
             <a:ext cx="2916936" cy="731520"/>
           </a:xfrm>
           <a:prstGeom prst="rect">
@@ -9674,7 +9529,7 @@
               </a:spcAft>
             </a:pPr>
             <a:r>
-              <a:rPr sz="819" b="1" i="0">
+              <a:rPr sz="819" b="1" i="0" dirty="0">
                 <a:solidFill>
                   <a:srgbClr val="0E7C7B"/>
                 </a:solidFill>
@@ -16517,7 +16372,7 @@
               </a:spcAft>
             </a:pPr>
             <a:r>
-              <a:rPr sz="740" b="0" i="0">
+              <a:rPr sz="740" b="0" i="0" dirty="0">
                 <a:solidFill>
                   <a:srgbClr val="1F2933"/>
                 </a:solidFill>
@@ -16536,7 +16391,7 @@
               </a:spcAft>
             </a:pPr>
             <a:r>
-              <a:rPr sz="740" b="0" i="0">
+              <a:rPr sz="740" b="0" i="0" dirty="0">
                 <a:solidFill>
                   <a:srgbClr val="1F2933"/>
                 </a:solidFill>
@@ -16555,7 +16410,7 @@
               </a:spcAft>
             </a:pPr>
             <a:r>
-              <a:rPr sz="740" b="0" i="0">
+              <a:rPr sz="740" b="0" i="0" dirty="0">
                 <a:solidFill>
                   <a:srgbClr val="1F2933"/>
                 </a:solidFill>
